--- a/dist/초4/과학/자석과상태변화/초4_과학_자석과상태변화_01_자석의성질_학생용.pptx
+++ b/dist/초4/과학/자석과상태변화/초4_과학_자석과상태변화_01_자석의성질_학생용.pptx
@@ -122,13 +122,13 @@
   <p:extLst>
     <p:ext uri="{521415D9-36F7-43E2-AB2F-B90AF26B5E84}">
       <p14:sectionLst xmlns:p14="http://schemas.microsoft.com/office/powerpoint/2010/main">
-        <p14:section name="도입" id="{da88b34c-e526-3fe8-0b4e-3399748192c9}">
+        <p14:section name="도입" id="{d68e55a8-219a-69cb-03bb-9bb37a056340}">
           <p14:sldIdLst>
             <p14:sldId id="256"/>
             <p14:sldId id="257"/>
           </p14:sldIdLst>
         </p14:section>
-        <p14:section name="연습" id="{a69cc5ca-6781-db65-3acf-316d46821d70}">
+        <p14:section name="연습" id="{698e1233-9d0e-a2f4-84d0-46dbb3a1d76a}">
           <p14:sldIdLst>
             <p14:sldId id="258"/>
             <p14:sldId id="259"/>
@@ -140,33 +140,33 @@
             <p14:sldId id="267"/>
           </p14:sldIdLst>
         </p14:section>
-        <p14:section name="개념" id="{f4dbed5e-557f-3286-14f0-2f6114c1f94a}">
+        <p14:section name="개념" id="{5db42f8d-3c2b-f3f8-71a7-7175ef7322f4}">
           <p14:sldIdLst>
             <p14:sldId id="261"/>
             <p14:sldId id="266"/>
           </p14:sldIdLst>
         </p14:section>
-        <p14:section name="연습" id="{c31b825b-8b95-1ab3-312a-d50478893644}">
+        <p14:section name="연습" id="{565fb8b2-4459-f684-2c38-aa58a9a06402}">
           <p14:sldIdLst/>
         </p14:section>
-        <p14:section name="개념" id="{1221771f-ee64-f4da-6c96-ac33e8973df0}">
+        <p14:section name="개념" id="{f26bc6d9-c0c5-c7cc-1896-0333805da440}">
           <p14:sldIdLst/>
         </p14:section>
-        <p14:section name="연습" id="{70a10f81-4fc8-ea0d-6050-c9191c2e5ea7}">
+        <p14:section name="연습" id="{9e2dd05c-bf96-6767-e90d-9bcdd8f539d2}">
           <p14:sldIdLst/>
         </p14:section>
-        <p14:section name="확인" id="{112f8282-e925-3e86-3cde-6828cc652bf2}">
+        <p14:section name="확인" id="{7a6b1db0-5a15-fc39-957b-72b6b15a8c41}">
           <p14:sldIdLst>
             <p14:sldId id="268"/>
             <p14:sldId id="269"/>
           </p14:sldIdLst>
         </p14:section>
-        <p14:section name="정리" id="{f098dfc3-0ac4-2b74-d3b6-43eaaae72a66}">
+        <p14:section name="정리" id="{47139140-f252-213d-c951-9025dffaf4cb}">
           <p14:sldIdLst>
             <p14:sldId id="270"/>
           </p14:sldIdLst>
         </p14:section>
-        <p14:section name="보충" id="{16d1778d-0af8-68b5-20e0-805e02519ada}">
+        <p14:section name="보충" id="{e3d56866-ba8d-a82a-a83f-e7c69813de03}">
           <p14:sldIdLst>
             <p14:sldId id="271"/>
           </p14:sldIdLst>
